--- a/curriculum/M01/W01/L02/slides.pptx
+++ b/curriculum/M01/W01/L02/slides.pptx
@@ -15473,11 +15473,40 @@
                 <a:ea typeface="Malgun Gothic"/>
                 <a:cs typeface="Malgun Gothic"/>
               </a:rPr>
-              <a:t>: 대기와 폐포 사이에서 공기를 주고받는다. 대류 수송이다. 2. </a:t>
-            </a:r>
+              <a:t>: 대기와 폐포 사이에서 공기를 주고받는다. 대류 수송이다.</a:t>
+            </a:r>
+          </a:p>
+          <a:p>
+            <a:pPr>
+              <a:spcAft>
+                <a:spcPts val="900"/>
+              </a:spcAft>
+            </a:pPr>
             <a:r>
               <a:rPr sz="1400" b="1" i="0">
                 <a:solidFill>
+                  <a:srgbClr val="F2B705"/>
+                </a:solidFill>
+                <a:latin typeface="Malgun Gothic"/>
+                <a:ea typeface="Malgun Gothic"/>
+                <a:cs typeface="Malgun Gothic"/>
+              </a:rPr>
+              <a:t>•  </a:t>
+            </a:r>
+            <a:r>
+              <a:rPr sz="1400" b="0" i="0">
+                <a:solidFill>
+                  <a:srgbClr val="11202B"/>
+                </a:solidFill>
+                <a:latin typeface="Malgun Gothic"/>
+                <a:ea typeface="Malgun Gothic"/>
+                <a:cs typeface="Malgun Gothic"/>
+              </a:rPr>
+              <a:t>2. </a:t>
+            </a:r>
+            <a:r>
+              <a:rPr sz="1400" b="1" i="0">
+                <a:solidFill>
                   <a:srgbClr val="11202B"/>
                 </a:solidFill>
                 <a:latin typeface="Malgun Gothic"/>
@@ -15495,11 +15524,40 @@
                 <a:ea typeface="Malgun Gothic"/>
                 <a:cs typeface="Malgun Gothic"/>
               </a:rPr>
-              <a:t>: 폐포와 폐 모세혈관 사이에서 산소와 이산화탄소가 분압차에 따라 확산한다. 3. </a:t>
-            </a:r>
+              <a:t>: 폐포와 폐 모세혈관 사이에서 산소와 이산화탄소가 분압차에 따라 확산한다.</a:t>
+            </a:r>
+          </a:p>
+          <a:p>
+            <a:pPr>
+              <a:spcAft>
+                <a:spcPts val="900"/>
+              </a:spcAft>
+            </a:pPr>
             <a:r>
               <a:rPr sz="1400" b="1" i="0">
                 <a:solidFill>
+                  <a:srgbClr val="F2B705"/>
+                </a:solidFill>
+                <a:latin typeface="Malgun Gothic"/>
+                <a:ea typeface="Malgun Gothic"/>
+                <a:cs typeface="Malgun Gothic"/>
+              </a:rPr>
+              <a:t>•  </a:t>
+            </a:r>
+            <a:r>
+              <a:rPr sz="1400" b="0" i="0">
+                <a:solidFill>
+                  <a:srgbClr val="11202B"/>
+                </a:solidFill>
+                <a:latin typeface="Malgun Gothic"/>
+                <a:ea typeface="Malgun Gothic"/>
+                <a:cs typeface="Malgun Gothic"/>
+              </a:rPr>
+              <a:t>3. </a:t>
+            </a:r>
+            <a:r>
+              <a:rPr sz="1400" b="1" i="0">
+                <a:solidFill>
                   <a:srgbClr val="11202B"/>
                 </a:solidFill>
                 <a:latin typeface="Malgun Gothic"/>
@@ -15517,7 +15575,36 @@
                 <a:ea typeface="Malgun Gothic"/>
                 <a:cs typeface="Malgun Gothic"/>
               </a:rPr>
-              <a:t>: 혈액이 산소와 이산화탄소를 조직과 폐 사이에서 실어 옮긴다. 대류 수송이다. 4. </a:t>
+              <a:t>: 혈액이 산소와 이산화탄소를 조직과 폐 사이에서 실어 옮긴다. 대류 수송이다.</a:t>
+            </a:r>
+          </a:p>
+          <a:p>
+            <a:pPr>
+              <a:spcAft>
+                <a:spcPts val="900"/>
+              </a:spcAft>
+            </a:pPr>
+            <a:r>
+              <a:rPr sz="1400" b="1" i="0">
+                <a:solidFill>
+                  <a:srgbClr val="F2B705"/>
+                </a:solidFill>
+                <a:latin typeface="Malgun Gothic"/>
+                <a:ea typeface="Malgun Gothic"/>
+                <a:cs typeface="Malgun Gothic"/>
+              </a:rPr>
+              <a:t>•  </a:t>
+            </a:r>
+            <a:r>
+              <a:rPr sz="1400" b="0" i="0">
+                <a:solidFill>
+                  <a:srgbClr val="11202B"/>
+                </a:solidFill>
+                <a:latin typeface="Malgun Gothic"/>
+                <a:ea typeface="Malgun Gothic"/>
+                <a:cs typeface="Malgun Gothic"/>
+              </a:rPr>
+              <a:t>4. </a:t>
             </a:r>
             <a:r>
               <a:rPr sz="1400" b="1" i="0">

--- a/curriculum/M01/W01/L02/slides.pptx
+++ b/curriculum/M01/W01/L02/slides.pptx
@@ -14496,7 +14496,7 @@
                 <a:ea typeface="Malgun Gothic"/>
                 <a:cs typeface="Malgun Gothic"/>
               </a:rPr>
-              <a:t>M01-W01-L01 순환계 요약 — 폐순환, 모세혈관 교환, 혈류와 압력</a:t>
+              <a:t>M01-W01-L01 순환계 요약: 심장·혈관·혈류와 항상성 — 폐순환, 모세혈관 교환, 혈류와 압력</a:t>
             </a:r>
           </a:p>
           <a:p>
